--- a/3_Allegati/Presentazione/MyAgenda.pptx
+++ b/3_Allegati/Presentazione/MyAgenda.pptx
@@ -292,7 +292,21 @@
           <a:p>
             <a:r>
               <a:rPr lang="en-US" dirty="0"/>
-              <a:t>Presentazione dell'app MyAgenda. Iniziare presentandosi e spiegando brevemente di cosa si tratta.</a:t>
+              <a:t>Presentazione dell'app MyAgenda. Iniziare presentandosi e spiegando brevemente di cosa si </a:t>
+            </a:r>
+            <a:r>
+              <a:rPr lang="en-US" dirty="0" err="1"/>
+              <a:t>tratta</a:t>
+            </a:r>
+            <a:r>
+              <a:rPr lang="en-US" dirty="0"/>
+              <a:t>.</a:t>
+            </a:r>
+          </a:p>
+          <a:p>
+            <a:r>
+              <a:rPr lang="en-US" dirty="0"/>
+              <a:t>David</a:t>
             </a:r>
           </a:p>
         </p:txBody>
@@ -379,7 +393,21 @@
           <a:p>
             <a:r>
               <a:rPr lang="en-US" dirty="0"/>
-              <a:t>Ringraziare la classe e i professori. Aprire alle domande.</a:t>
+              <a:t>Ringraziare la classe e i professori. Aprire alle </a:t>
+            </a:r>
+            <a:r>
+              <a:rPr lang="en-US" dirty="0" err="1"/>
+              <a:t>domande</a:t>
+            </a:r>
+            <a:r>
+              <a:rPr lang="en-US" dirty="0"/>
+              <a:t>.</a:t>
+            </a:r>
+          </a:p>
+          <a:p>
+            <a:r>
+              <a:rPr lang="en-US" dirty="0"/>
+              <a:t>Matteo</a:t>
             </a:r>
           </a:p>
         </p:txBody>
@@ -466,7 +494,37 @@
           <a:p>
             <a:r>
               <a:rPr lang="en-US" dirty="0"/>
-              <a:t>Breve panoramica dei temi trattati. Non soffermarsi troppo.</a:t>
+              <a:t>Breve panoramica dei </a:t>
+            </a:r>
+            <a:r>
+              <a:rPr lang="en-US" dirty="0" err="1"/>
+              <a:t>temi</a:t>
+            </a:r>
+            <a:r>
+              <a:rPr lang="en-US" dirty="0"/>
+              <a:t> </a:t>
+            </a:r>
+            <a:r>
+              <a:rPr lang="en-US" dirty="0" err="1"/>
+              <a:t>trattati</a:t>
+            </a:r>
+            <a:r>
+              <a:rPr lang="en-US" dirty="0"/>
+              <a:t>. Non soffermarsi </a:t>
+            </a:r>
+            <a:r>
+              <a:rPr lang="en-US" dirty="0" err="1"/>
+              <a:t>troppo</a:t>
+            </a:r>
+            <a:r>
+              <a:rPr lang="en-US" dirty="0"/>
+              <a:t>.</a:t>
+            </a:r>
+          </a:p>
+          <a:p>
+            <a:r>
+              <a:rPr lang="en-US" dirty="0"/>
+              <a:t>David</a:t>
             </a:r>
           </a:p>
         </p:txBody>
@@ -553,7 +611,37 @@
           <a:p>
             <a:r>
               <a:rPr lang="en-US" dirty="0"/>
-              <a:t>Spiegare il contesto: studente che deve tenere traccia di tutto. MyAgenda è la soluzione.</a:t>
+              <a:t>Spiegare il contesto: studente che </a:t>
+            </a:r>
+            <a:r>
+              <a:rPr lang="en-US" dirty="0" err="1"/>
+              <a:t>deve</a:t>
+            </a:r>
+            <a:r>
+              <a:rPr lang="en-US" dirty="0"/>
+              <a:t> </a:t>
+            </a:r>
+            <a:r>
+              <a:rPr lang="en-US" dirty="0" err="1"/>
+              <a:t>tenere</a:t>
+            </a:r>
+            <a:r>
+              <a:rPr lang="en-US" dirty="0"/>
+              <a:t> traccia di tutto. MyAgenda è la </a:t>
+            </a:r>
+            <a:r>
+              <a:rPr lang="en-US" dirty="0" err="1"/>
+              <a:t>soluzione</a:t>
+            </a:r>
+            <a:r>
+              <a:rPr lang="en-US" dirty="0"/>
+              <a:t>.</a:t>
+            </a:r>
+          </a:p>
+          <a:p>
+            <a:r>
+              <a:rPr lang="en-US" dirty="0"/>
+              <a:t>Mateo</a:t>
             </a:r>
           </a:p>
         </p:txBody>
@@ -640,7 +728,21 @@
           <a:p>
             <a:r>
               <a:rPr lang="en-US" dirty="0"/>
-              <a:t>Elencare le funzionalità con calma. Sottolineare che ognuna è pensata per lo studente.</a:t>
+              <a:t>Elencare le funzionalità con calma. Sottolineare che ognuna è pensata per lo </a:t>
+            </a:r>
+            <a:r>
+              <a:rPr lang="en-US" dirty="0" err="1"/>
+              <a:t>studente</a:t>
+            </a:r>
+            <a:r>
+              <a:rPr lang="en-US" dirty="0"/>
+              <a:t>.</a:t>
+            </a:r>
+          </a:p>
+          <a:p>
+            <a:r>
+              <a:rPr lang="en-US" dirty="0"/>
+              <a:t>David</a:t>
             </a:r>
           </a:p>
         </p:txBody>
@@ -730,6 +832,12 @@
               <a:t>Spiegare perché MAUI: unico codice per 3 piattaforme. Descrivere la separazione Models/Services.</a:t>
             </a:r>
           </a:p>
+          <a:p>
+            <a:r>
+              <a:rPr lang="en-US" dirty="0"/>
+              <a:t>Mateo</a:t>
+            </a:r>
+          </a:p>
         </p:txBody>
       </p:sp>
       <p:sp>
@@ -817,6 +925,12 @@
               <a:t>Spiegare che le password NON vengono mai salvate in chiaro. Il salt rende unico ogni hash.</a:t>
             </a:r>
           </a:p>
+          <a:p>
+            <a:r>
+              <a:rPr lang="en-US" dirty="0"/>
+              <a:t>David</a:t>
+            </a:r>
+          </a:p>
         </p:txBody>
       </p:sp>
       <p:sp>
@@ -901,7 +1015,21 @@
           <a:p>
             <a:r>
               <a:rPr lang="en-US" dirty="0"/>
-              <a:t>Mostrare che il tema cambia visivamente in tempo reale. DynamicResource è la chiave tecnica.</a:t>
+              <a:t>Mostrare che il tema cambia visivamente in tempo reale. DynamicResource è la chiave </a:t>
+            </a:r>
+            <a:r>
+              <a:rPr lang="en-US" dirty="0" err="1"/>
+              <a:t>tecnica</a:t>
+            </a:r>
+            <a:r>
+              <a:rPr lang="en-US" dirty="0"/>
+              <a:t>.</a:t>
+            </a:r>
+          </a:p>
+          <a:p>
+            <a:r>
+              <a:rPr lang="en-US" dirty="0"/>
+              <a:t>Matteo</a:t>
             </a:r>
           </a:p>
         </p:txBody>
@@ -988,7 +1116,21 @@
           <a:p>
             <a:r>
               <a:rPr lang="en-US" dirty="0"/>
-              <a:t>Sottolineare che ogni servizio ha una sola responsabilità (SRP). Il codice è più facile da testare e mantenere.</a:t>
+              <a:t>Sottolineare che ogni servizio ha una sola responsabilità (SRP). Il codice è più facile da testare e </a:t>
+            </a:r>
+            <a:r>
+              <a:rPr lang="en-US" dirty="0" err="1"/>
+              <a:t>mantenere</a:t>
+            </a:r>
+            <a:r>
+              <a:rPr lang="en-US" dirty="0"/>
+              <a:t>.</a:t>
+            </a:r>
+          </a:p>
+          <a:p>
+            <a:r>
+              <a:rPr lang="en-US" dirty="0"/>
+              <a:t>Mateo</a:t>
             </a:r>
           </a:p>
         </p:txBody>
@@ -1075,7 +1217,21 @@
           <a:p>
             <a:r>
               <a:rPr lang="en-US" dirty="0"/>
-              <a:t>Mostrare l'app in diretta se possibile. Altrimenti descrivere ogni schermata.</a:t>
+              <a:t>Mostrare l'app in diretta se possibile. Altrimenti descrivere ogni </a:t>
+            </a:r>
+            <a:r>
+              <a:rPr lang="en-US" dirty="0" err="1"/>
+              <a:t>schermata</a:t>
+            </a:r>
+            <a:r>
+              <a:rPr lang="en-US" dirty="0"/>
+              <a:t>.</a:t>
+            </a:r>
+          </a:p>
+          <a:p>
+            <a:r>
+              <a:rPr lang="en-US" dirty="0"/>
+              <a:t>David</a:t>
             </a:r>
           </a:p>
         </p:txBody>
@@ -5847,7 +6003,7 @@
                 <a:ea typeface="Calibri" pitchFamily="34" charset="-122"/>
                 <a:cs typeface="Calibri" pitchFamily="34" charset="-120"/>
               </a:rPr>
-              <a:t>C#</a:t>
+              <a:t>C# 12</a:t>
             </a:r>
             <a:endParaRPr lang="en-US" sz="1300" dirty="0"/>
           </a:p>

--- a/3_Allegati/Presentazione/MyAgenda.pptx
+++ b/3_Allegati/Presentazione/MyAgenda.pptx
@@ -5,7 +5,7 @@
     <p:sldMasterId id="2147483648" r:id="rId1"/>
   </p:sldMasterIdLst>
   <p:notesMasterIdLst>
-    <p:notesMasterId r:id="rId12"/>
+    <p:notesMasterId r:id="rId13"/>
   </p:notesMasterIdLst>
   <p:sldIdLst>
     <p:sldId id="256" r:id="rId2"/>
@@ -17,7 +17,8 @@
     <p:sldId id="262" r:id="rId8"/>
     <p:sldId id="263" r:id="rId9"/>
     <p:sldId id="264" r:id="rId10"/>
-    <p:sldId id="265" r:id="rId11"/>
+    <p:sldId id="266" r:id="rId11"/>
+    <p:sldId id="265" r:id="rId12"/>
   </p:sldIdLst>
   <p:sldSz cx="9144000" cy="5143500" type="screen16x9"/>
   <p:notesSz cx="5143500" cy="9144000"/>
@@ -366,6 +367,89 @@
       </p:grpSpPr>
       <p:sp>
         <p:nvSpPr>
+          <p:cNvPr id="2" name="Segnaposto immagine diapositiva 1"/>
+          <p:cNvSpPr>
+            <a:spLocks noGrp="1" noRot="1" noChangeAspect="1"/>
+          </p:cNvSpPr>
+          <p:nvPr>
+            <p:ph type="sldImg"/>
+          </p:nvPr>
+        </p:nvSpPr>
+        <p:spPr>
+          <a:xfrm>
+            <a:off x="-171450" y="1143000"/>
+            <a:ext cx="5486400" cy="3086100"/>
+          </a:xfrm>
+          <a:prstGeom prst="rect">
+            <a:avLst/>
+          </a:prstGeom>
+          <a:noFill/>
+          <a:ln w="12700">
+            <a:solidFill>
+              <a:prstClr val="black"/>
+            </a:solidFill>
+          </a:ln>
+        </p:spPr>
+      </p:sp>
+      <p:sp>
+        <p:nvSpPr>
+          <p:cNvPr id="3" name="Segnaposto note 2"/>
+          <p:cNvSpPr>
+            <a:spLocks noGrp="1"/>
+          </p:cNvSpPr>
+          <p:nvPr>
+            <p:ph type="body" idx="1"/>
+          </p:nvPr>
+        </p:nvSpPr>
+        <p:spPr>
+          <a:xfrm>
+            <a:off x="514350" y="4400550"/>
+            <a:ext cx="4114800" cy="3600450"/>
+          </a:xfrm>
+          <a:prstGeom prst="rect">
+            <a:avLst/>
+          </a:prstGeom>
+        </p:spPr>
+        <p:txBody>
+          <a:bodyPr/>
+          <a:lstStyle/>
+          <a:p>
+            <a:endParaRPr lang="it-CH" dirty="0"/>
+          </a:p>
+        </p:txBody>
+      </p:sp>
+    </p:spTree>
+    <p:extLst>
+      <p:ext uri="{BB962C8B-B14F-4D97-AF65-F5344CB8AC3E}">
+        <p14:creationId xmlns:p14="http://schemas.microsoft.com/office/powerpoint/2010/main" val="766042177"/>
+      </p:ext>
+    </p:extLst>
+  </p:cSld>
+  <p:clrMapOvr>
+    <a:masterClrMapping/>
+  </p:clrMapOvr>
+</p:notes>
+</file>
+
+<file path=ppt/notesSlides/notesSlide11.xml><?xml version="1.0" encoding="utf-8"?>
+<p:notes xmlns:a="http://schemas.openxmlformats.org/drawingml/2006/main" xmlns:r="http://schemas.openxmlformats.org/officeDocument/2006/relationships" xmlns:p="http://schemas.openxmlformats.org/presentationml/2006/main">
+  <p:cSld>
+    <p:spTree>
+      <p:nvGrpSpPr>
+        <p:cNvPr id="1" name=""/>
+        <p:cNvGrpSpPr/>
+        <p:nvPr/>
+      </p:nvGrpSpPr>
+      <p:grpSpPr>
+        <a:xfrm>
+          <a:off x="0" y="0"/>
+          <a:ext cx="0" cy="0"/>
+          <a:chOff x="0" y="0"/>
+          <a:chExt cx="0" cy="0"/>
+        </a:xfrm>
+      </p:grpSpPr>
+      <p:sp>
+        <p:nvSpPr>
           <p:cNvPr id="2" name="Slide Image Placeholder 1"/>
           <p:cNvSpPr>
             <a:spLocks noGrp="1" noRot="1" noChangeAspect="1"/>
@@ -429,7 +513,7 @@
           <a:p>
             <a:fld id="{F7021451-1387-4CA6-816F-3879F97B5CBC}" type="slidenum">
               <a:rPr lang="en-US"/>
-              <a:t>10</a:t>
+              <a:t>11</a:t>
             </a:fld>
             <a:endParaRPr lang="en-US"/>
           </a:p>
@@ -2003,6 +2087,2177 @@
 </file>
 
 <file path=ppt/slides/slide10.xml><?xml version="1.0" encoding="utf-8"?>
+<p:sld xmlns:a="http://schemas.openxmlformats.org/drawingml/2006/main" xmlns:r="http://schemas.openxmlformats.org/officeDocument/2006/relationships" xmlns:p="http://schemas.openxmlformats.org/presentationml/2006/main">
+  <p:cSld>
+    <p:bg>
+      <p:bgPr>
+        <a:solidFill>
+          <a:srgbClr val="F8FAFC"/>
+        </a:solidFill>
+        <a:effectLst/>
+      </p:bgPr>
+    </p:bg>
+    <p:spTree>
+      <p:nvGrpSpPr>
+        <p:cNvPr id="1" name=""/>
+        <p:cNvGrpSpPr/>
+        <p:nvPr/>
+      </p:nvGrpSpPr>
+      <p:grpSpPr>
+        <a:xfrm>
+          <a:off x="0" y="0"/>
+          <a:ext cx="0" cy="0"/>
+          <a:chOff x="0" y="0"/>
+          <a:chExt cx="0" cy="0"/>
+        </a:xfrm>
+      </p:grpSpPr>
+      <p:sp>
+        <p:nvSpPr>
+          <p:cNvPr id="2" name="Text 0"/>
+          <p:cNvSpPr/>
+          <p:nvPr/>
+        </p:nvSpPr>
+        <p:spPr>
+          <a:xfrm>
+            <a:off x="457200" y="274320"/>
+            <a:ext cx="8229600" cy="502920"/>
+          </a:xfrm>
+          <a:prstGeom prst="rect">
+            <a:avLst/>
+          </a:prstGeom>
+          <a:noFill/>
+          <a:ln/>
+        </p:spPr>
+        <p:txBody>
+          <a:bodyPr wrap="square" lIns="0" tIns="0" rIns="0" bIns="0" rtlCol="0" anchor="ctr"/>
+          <a:lstStyle/>
+          <a:p>
+            <a:pPr marL="0" indent="0" algn="l">
+              <a:buNone/>
+            </a:pPr>
+            <a:r>
+              <a:rPr lang="en-US" sz="2800" b="1" dirty="0">
+                <a:solidFill>
+                  <a:srgbClr val="111827"/>
+                </a:solidFill>
+                <a:latin typeface="Calibri" pitchFamily="34" charset="0"/>
+                <a:ea typeface="Calibri" pitchFamily="34" charset="-122"/>
+                <a:cs typeface="Calibri" pitchFamily="34" charset="-120"/>
+              </a:rPr>
+              <a:t>Suddivisione del lavoro</a:t>
+            </a:r>
+            <a:endParaRPr lang="en-US" sz="2800" dirty="0"/>
+          </a:p>
+        </p:txBody>
+      </p:sp>
+      <p:sp>
+        <p:nvSpPr>
+          <p:cNvPr id="3" name="Text 1"/>
+          <p:cNvSpPr/>
+          <p:nvPr/>
+        </p:nvSpPr>
+        <p:spPr>
+          <a:xfrm>
+            <a:off x="457200" y="804672"/>
+            <a:ext cx="8229600" cy="320040"/>
+          </a:xfrm>
+          <a:prstGeom prst="rect">
+            <a:avLst/>
+          </a:prstGeom>
+          <a:noFill/>
+          <a:ln/>
+        </p:spPr>
+        <p:txBody>
+          <a:bodyPr wrap="square" lIns="0" tIns="0" rIns="0" bIns="0" rtlCol="0" anchor="ctr"/>
+          <a:lstStyle/>
+          <a:p>
+            <a:pPr marL="0" indent="0" algn="l">
+              <a:buNone/>
+            </a:pPr>
+            <a:r>
+              <a:rPr lang="en-US" sz="1400" dirty="0">
+                <a:solidFill>
+                  <a:srgbClr val="6B7280"/>
+                </a:solidFill>
+                <a:latin typeface="Calibri" pitchFamily="34" charset="0"/>
+                <a:ea typeface="Calibri" pitchFamily="34" charset="-122"/>
+                <a:cs typeface="Calibri" pitchFamily="34" charset="-120"/>
+              </a:rPr>
+              <a:t>Contributo di ogni membro del team</a:t>
+            </a:r>
+            <a:endParaRPr lang="en-US" sz="1400" dirty="0"/>
+          </a:p>
+        </p:txBody>
+      </p:sp>
+      <p:sp>
+        <p:nvSpPr>
+          <p:cNvPr id="4" name="Shape 2"/>
+          <p:cNvSpPr/>
+          <p:nvPr/>
+        </p:nvSpPr>
+        <p:spPr>
+          <a:xfrm>
+            <a:off x="347472" y="1234440"/>
+            <a:ext cx="2743200" cy="3566160"/>
+          </a:xfrm>
+          <a:prstGeom prst="roundRect">
+            <a:avLst>
+              <a:gd name="adj" fmla="val 4667"/>
+            </a:avLst>
+          </a:prstGeom>
+          <a:solidFill>
+            <a:srgbClr val="FFFFFF"/>
+          </a:solidFill>
+          <a:ln w="12700">
+            <a:solidFill>
+              <a:srgbClr val="E5E7EB"/>
+            </a:solidFill>
+            <a:prstDash val="solid"/>
+          </a:ln>
+          <a:effectLst>
+            <a:outerShdw blurRad="101600" dist="38100" dir="2700000" algn="bl" rotWithShape="0">
+              <a:srgbClr val="000000">
+                <a:alpha val="10000"/>
+              </a:srgbClr>
+            </a:outerShdw>
+          </a:effectLst>
+        </p:spPr>
+      </p:sp>
+      <p:sp>
+        <p:nvSpPr>
+          <p:cNvPr id="5" name="Shape 3"/>
+          <p:cNvSpPr/>
+          <p:nvPr/>
+        </p:nvSpPr>
+        <p:spPr>
+          <a:xfrm>
+            <a:off x="347472" y="1234440"/>
+            <a:ext cx="2743200" cy="621792"/>
+          </a:xfrm>
+          <a:prstGeom prst="roundRect">
+            <a:avLst>
+              <a:gd name="adj" fmla="val 20588"/>
+            </a:avLst>
+          </a:prstGeom>
+          <a:solidFill>
+            <a:srgbClr val="2563EB"/>
+          </a:solidFill>
+          <a:ln w="12700">
+            <a:solidFill>
+              <a:srgbClr val="2563EB"/>
+            </a:solidFill>
+            <a:prstDash val="solid"/>
+          </a:ln>
+        </p:spPr>
+        <p:txBody>
+          <a:bodyPr/>
+          <a:lstStyle/>
+          <a:p>
+            <a:endParaRPr lang="it-CH" dirty="0"/>
+          </a:p>
+        </p:txBody>
+      </p:sp>
+      <p:sp>
+        <p:nvSpPr>
+          <p:cNvPr id="6" name="Shape 4"/>
+          <p:cNvSpPr/>
+          <p:nvPr/>
+        </p:nvSpPr>
+        <p:spPr>
+          <a:xfrm>
+            <a:off x="347472" y="1600200"/>
+            <a:ext cx="2743200" cy="256032"/>
+          </a:xfrm>
+          <a:prstGeom prst="rect">
+            <a:avLst/>
+          </a:prstGeom>
+          <a:solidFill>
+            <a:srgbClr val="2563EB"/>
+          </a:solidFill>
+          <a:ln w="12700">
+            <a:solidFill>
+              <a:srgbClr val="2563EB"/>
+            </a:solidFill>
+            <a:prstDash val="solid"/>
+          </a:ln>
+        </p:spPr>
+      </p:sp>
+      <p:sp>
+        <p:nvSpPr>
+          <p:cNvPr id="7" name="Text 5"/>
+          <p:cNvSpPr/>
+          <p:nvPr/>
+        </p:nvSpPr>
+        <p:spPr>
+          <a:xfrm>
+            <a:off x="484632" y="1344168"/>
+            <a:ext cx="2468880" cy="402336"/>
+          </a:xfrm>
+          <a:prstGeom prst="rect">
+            <a:avLst/>
+          </a:prstGeom>
+          <a:noFill/>
+          <a:ln/>
+        </p:spPr>
+        <p:txBody>
+          <a:bodyPr wrap="square" lIns="0" tIns="0" rIns="0" bIns="0" rtlCol="0" anchor="ctr"/>
+          <a:lstStyle/>
+          <a:p>
+            <a:pPr marL="0" indent="0" algn="ctr">
+              <a:buNone/>
+            </a:pPr>
+            <a:r>
+              <a:rPr lang="en-US" sz="1800" b="1" dirty="0">
+                <a:solidFill>
+                  <a:srgbClr val="FFFFFF"/>
+                </a:solidFill>
+                <a:latin typeface="Calibri" pitchFamily="34" charset="0"/>
+                <a:ea typeface="Calibri" pitchFamily="34" charset="-122"/>
+                <a:cs typeface="Calibri" pitchFamily="34" charset="-120"/>
+              </a:rPr>
+              <a:t>David (Team Leader)</a:t>
+            </a:r>
+            <a:endParaRPr lang="en-US" sz="1800" dirty="0"/>
+          </a:p>
+        </p:txBody>
+      </p:sp>
+      <p:sp>
+        <p:nvSpPr>
+          <p:cNvPr id="8" name="Shape 6"/>
+          <p:cNvSpPr/>
+          <p:nvPr/>
+        </p:nvSpPr>
+        <p:spPr>
+          <a:xfrm>
+            <a:off x="484632" y="2066544"/>
+            <a:ext cx="164592" cy="164592"/>
+          </a:xfrm>
+          <a:prstGeom prst="ellipse">
+            <a:avLst/>
+          </a:prstGeom>
+          <a:solidFill>
+            <a:srgbClr val="2563EB"/>
+          </a:solidFill>
+          <a:ln w="12700">
+            <a:solidFill>
+              <a:srgbClr val="2563EB"/>
+            </a:solidFill>
+            <a:prstDash val="solid"/>
+          </a:ln>
+        </p:spPr>
+      </p:sp>
+      <p:sp>
+        <p:nvSpPr>
+          <p:cNvPr id="9" name="Text 7"/>
+          <p:cNvSpPr/>
+          <p:nvPr/>
+        </p:nvSpPr>
+        <p:spPr>
+          <a:xfrm>
+            <a:off x="713232" y="1984248"/>
+            <a:ext cx="2240280" cy="420624"/>
+          </a:xfrm>
+          <a:prstGeom prst="rect">
+            <a:avLst/>
+          </a:prstGeom>
+          <a:noFill/>
+          <a:ln/>
+        </p:spPr>
+        <p:txBody>
+          <a:bodyPr wrap="square" lIns="0" tIns="0" rIns="0" bIns="0" rtlCol="0" anchor="ctr"/>
+          <a:lstStyle/>
+          <a:p>
+            <a:pPr marL="0" indent="0">
+              <a:buNone/>
+            </a:pPr>
+            <a:r>
+              <a:rPr lang="en-US" sz="1150" dirty="0" err="1">
+                <a:solidFill>
+                  <a:srgbClr val="374151"/>
+                </a:solidFill>
+                <a:latin typeface="Calibri" pitchFamily="34" charset="0"/>
+                <a:ea typeface="Calibri" pitchFamily="34" charset="-122"/>
+                <a:cs typeface="Calibri" pitchFamily="34" charset="-120"/>
+              </a:rPr>
+              <a:t>Architettura</a:t>
+            </a:r>
+            <a:r>
+              <a:rPr lang="en-US" sz="1150" dirty="0">
+                <a:solidFill>
+                  <a:srgbClr val="374151"/>
+                </a:solidFill>
+                <a:latin typeface="Calibri" pitchFamily="34" charset="0"/>
+                <a:ea typeface="Calibri" pitchFamily="34" charset="-122"/>
+                <a:cs typeface="Calibri" pitchFamily="34" charset="-120"/>
+              </a:rPr>
+              <a:t> del progetto</a:t>
+            </a:r>
+            <a:endParaRPr lang="en-US" sz="1150" dirty="0"/>
+          </a:p>
+        </p:txBody>
+      </p:sp>
+      <p:sp>
+        <p:nvSpPr>
+          <p:cNvPr id="10" name="Shape 8"/>
+          <p:cNvSpPr/>
+          <p:nvPr/>
+        </p:nvSpPr>
+        <p:spPr>
+          <a:xfrm>
+            <a:off x="484632" y="2423160"/>
+            <a:ext cx="2468880" cy="9144"/>
+          </a:xfrm>
+          <a:prstGeom prst="rect">
+            <a:avLst/>
+          </a:prstGeom>
+          <a:solidFill>
+            <a:srgbClr val="E5E7EB"/>
+          </a:solidFill>
+          <a:ln w="12700">
+            <a:solidFill>
+              <a:srgbClr val="E5E7EB"/>
+            </a:solidFill>
+            <a:prstDash val="solid"/>
+          </a:ln>
+        </p:spPr>
+      </p:sp>
+      <p:sp>
+        <p:nvSpPr>
+          <p:cNvPr id="11" name="Shape 9"/>
+          <p:cNvSpPr/>
+          <p:nvPr/>
+        </p:nvSpPr>
+        <p:spPr>
+          <a:xfrm>
+            <a:off x="484632" y="2523744"/>
+            <a:ext cx="164592" cy="164592"/>
+          </a:xfrm>
+          <a:prstGeom prst="ellipse">
+            <a:avLst/>
+          </a:prstGeom>
+          <a:solidFill>
+            <a:srgbClr val="2563EB"/>
+          </a:solidFill>
+          <a:ln w="12700">
+            <a:solidFill>
+              <a:srgbClr val="2563EB"/>
+            </a:solidFill>
+            <a:prstDash val="solid"/>
+          </a:ln>
+        </p:spPr>
+      </p:sp>
+      <p:sp>
+        <p:nvSpPr>
+          <p:cNvPr id="12" name="Text 10"/>
+          <p:cNvSpPr/>
+          <p:nvPr/>
+        </p:nvSpPr>
+        <p:spPr>
+          <a:xfrm>
+            <a:off x="713232" y="2441448"/>
+            <a:ext cx="2240280" cy="420624"/>
+          </a:xfrm>
+          <a:prstGeom prst="rect">
+            <a:avLst/>
+          </a:prstGeom>
+          <a:noFill/>
+          <a:ln/>
+        </p:spPr>
+        <p:txBody>
+          <a:bodyPr wrap="square" lIns="0" tIns="0" rIns="0" bIns="0" rtlCol="0" anchor="ctr"/>
+          <a:lstStyle/>
+          <a:p>
+            <a:pPr marL="0" indent="0">
+              <a:buNone/>
+            </a:pPr>
+            <a:r>
+              <a:rPr lang="en-US" sz="1150" dirty="0">
+                <a:solidFill>
+                  <a:srgbClr val="374151"/>
+                </a:solidFill>
+                <a:latin typeface="Calibri" pitchFamily="34" charset="0"/>
+                <a:ea typeface="Calibri" pitchFamily="34" charset="-122"/>
+                <a:cs typeface="Calibri" pitchFamily="34" charset="-120"/>
+              </a:rPr>
+              <a:t>AuthService (login, registrazione, SHA-256)</a:t>
+            </a:r>
+            <a:endParaRPr lang="en-US" sz="1150" dirty="0"/>
+          </a:p>
+        </p:txBody>
+      </p:sp>
+      <p:sp>
+        <p:nvSpPr>
+          <p:cNvPr id="13" name="Shape 11"/>
+          <p:cNvSpPr/>
+          <p:nvPr/>
+        </p:nvSpPr>
+        <p:spPr>
+          <a:xfrm>
+            <a:off x="484632" y="2880360"/>
+            <a:ext cx="2468880" cy="9144"/>
+          </a:xfrm>
+          <a:prstGeom prst="rect">
+            <a:avLst/>
+          </a:prstGeom>
+          <a:solidFill>
+            <a:srgbClr val="E5E7EB"/>
+          </a:solidFill>
+          <a:ln w="12700">
+            <a:solidFill>
+              <a:srgbClr val="E5E7EB"/>
+            </a:solidFill>
+            <a:prstDash val="solid"/>
+          </a:ln>
+        </p:spPr>
+      </p:sp>
+      <p:sp>
+        <p:nvSpPr>
+          <p:cNvPr id="14" name="Shape 12"/>
+          <p:cNvSpPr/>
+          <p:nvPr/>
+        </p:nvSpPr>
+        <p:spPr>
+          <a:xfrm>
+            <a:off x="484632" y="2980944"/>
+            <a:ext cx="164592" cy="164592"/>
+          </a:xfrm>
+          <a:prstGeom prst="ellipse">
+            <a:avLst/>
+          </a:prstGeom>
+          <a:solidFill>
+            <a:srgbClr val="2563EB"/>
+          </a:solidFill>
+          <a:ln w="12700">
+            <a:solidFill>
+              <a:srgbClr val="2563EB"/>
+            </a:solidFill>
+            <a:prstDash val="solid"/>
+          </a:ln>
+        </p:spPr>
+      </p:sp>
+      <p:sp>
+        <p:nvSpPr>
+          <p:cNvPr id="15" name="Text 13"/>
+          <p:cNvSpPr/>
+          <p:nvPr/>
+        </p:nvSpPr>
+        <p:spPr>
+          <a:xfrm>
+            <a:off x="713232" y="2898648"/>
+            <a:ext cx="2240280" cy="420624"/>
+          </a:xfrm>
+          <a:prstGeom prst="rect">
+            <a:avLst/>
+          </a:prstGeom>
+          <a:noFill/>
+          <a:ln/>
+        </p:spPr>
+        <p:txBody>
+          <a:bodyPr wrap="square" lIns="0" tIns="0" rIns="0" bIns="0" rtlCol="0" anchor="ctr"/>
+          <a:lstStyle/>
+          <a:p>
+            <a:pPr marL="0" indent="0">
+              <a:buNone/>
+            </a:pPr>
+            <a:r>
+              <a:rPr lang="en-US" sz="1150" dirty="0" err="1">
+                <a:solidFill>
+                  <a:srgbClr val="374151"/>
+                </a:solidFill>
+                <a:latin typeface="Calibri" pitchFamily="34" charset="0"/>
+                <a:ea typeface="Calibri" pitchFamily="34" charset="-122"/>
+                <a:cs typeface="Calibri" pitchFamily="34" charset="-120"/>
+              </a:rPr>
+              <a:t>Navigazione</a:t>
+            </a:r>
+            <a:r>
+              <a:rPr lang="en-US" sz="1150" dirty="0">
+                <a:solidFill>
+                  <a:srgbClr val="374151"/>
+                </a:solidFill>
+                <a:latin typeface="Calibri" pitchFamily="34" charset="0"/>
+                <a:ea typeface="Calibri" pitchFamily="34" charset="-122"/>
+                <a:cs typeface="Calibri" pitchFamily="34" charset="-120"/>
+              </a:rPr>
+              <a:t> </a:t>
+            </a:r>
+            <a:r>
+              <a:rPr lang="en-US" sz="1150" dirty="0" err="1">
+                <a:solidFill>
+                  <a:srgbClr val="374151"/>
+                </a:solidFill>
+                <a:latin typeface="Calibri" pitchFamily="34" charset="0"/>
+                <a:ea typeface="Calibri" pitchFamily="34" charset="-122"/>
+                <a:cs typeface="Calibri" pitchFamily="34" charset="-120"/>
+              </a:rPr>
+              <a:t>pagine</a:t>
+            </a:r>
+            <a:endParaRPr lang="en-US" sz="1150" dirty="0"/>
+          </a:p>
+        </p:txBody>
+      </p:sp>
+      <p:sp>
+        <p:nvSpPr>
+          <p:cNvPr id="16" name="Shape 14"/>
+          <p:cNvSpPr/>
+          <p:nvPr/>
+        </p:nvSpPr>
+        <p:spPr>
+          <a:xfrm>
+            <a:off x="484632" y="3337560"/>
+            <a:ext cx="2468880" cy="9144"/>
+          </a:xfrm>
+          <a:prstGeom prst="rect">
+            <a:avLst/>
+          </a:prstGeom>
+          <a:solidFill>
+            <a:srgbClr val="E5E7EB"/>
+          </a:solidFill>
+          <a:ln w="12700">
+            <a:solidFill>
+              <a:srgbClr val="E5E7EB"/>
+            </a:solidFill>
+            <a:prstDash val="solid"/>
+          </a:ln>
+        </p:spPr>
+      </p:sp>
+      <p:sp>
+        <p:nvSpPr>
+          <p:cNvPr id="17" name="Shape 15"/>
+          <p:cNvSpPr/>
+          <p:nvPr/>
+        </p:nvSpPr>
+        <p:spPr>
+          <a:xfrm>
+            <a:off x="484632" y="3438144"/>
+            <a:ext cx="164592" cy="164592"/>
+          </a:xfrm>
+          <a:prstGeom prst="ellipse">
+            <a:avLst/>
+          </a:prstGeom>
+          <a:solidFill>
+            <a:srgbClr val="2563EB"/>
+          </a:solidFill>
+          <a:ln w="12700">
+            <a:solidFill>
+              <a:srgbClr val="2563EB"/>
+            </a:solidFill>
+            <a:prstDash val="solid"/>
+          </a:ln>
+        </p:spPr>
+      </p:sp>
+      <p:sp>
+        <p:nvSpPr>
+          <p:cNvPr id="18" name="Text 16"/>
+          <p:cNvSpPr/>
+          <p:nvPr/>
+        </p:nvSpPr>
+        <p:spPr>
+          <a:xfrm>
+            <a:off x="713232" y="3355848"/>
+            <a:ext cx="2240280" cy="420624"/>
+          </a:xfrm>
+          <a:prstGeom prst="rect">
+            <a:avLst/>
+          </a:prstGeom>
+          <a:noFill/>
+          <a:ln/>
+        </p:spPr>
+        <p:txBody>
+          <a:bodyPr wrap="square" lIns="0" tIns="0" rIns="0" bIns="0" rtlCol="0" anchor="ctr"/>
+          <a:lstStyle/>
+          <a:p>
+            <a:pPr marL="0" indent="0">
+              <a:buNone/>
+            </a:pPr>
+            <a:r>
+              <a:rPr lang="en-US" sz="1150" dirty="0" err="1">
+                <a:solidFill>
+                  <a:srgbClr val="374151"/>
+                </a:solidFill>
+                <a:latin typeface="Calibri" pitchFamily="34" charset="0"/>
+                <a:ea typeface="Calibri" pitchFamily="34" charset="-122"/>
+                <a:cs typeface="Calibri" pitchFamily="34" charset="-120"/>
+              </a:rPr>
+              <a:t>Documentazione</a:t>
+            </a:r>
+            <a:endParaRPr lang="en-US" sz="1150" dirty="0"/>
+          </a:p>
+        </p:txBody>
+      </p:sp>
+      <p:sp>
+        <p:nvSpPr>
+          <p:cNvPr id="19" name="Shape 17"/>
+          <p:cNvSpPr/>
+          <p:nvPr/>
+        </p:nvSpPr>
+        <p:spPr>
+          <a:xfrm>
+            <a:off x="484632" y="3794760"/>
+            <a:ext cx="2468880" cy="9144"/>
+          </a:xfrm>
+          <a:prstGeom prst="rect">
+            <a:avLst/>
+          </a:prstGeom>
+          <a:solidFill>
+            <a:srgbClr val="E5E7EB"/>
+          </a:solidFill>
+          <a:ln w="12700">
+            <a:solidFill>
+              <a:srgbClr val="E5E7EB"/>
+            </a:solidFill>
+            <a:prstDash val="solid"/>
+          </a:ln>
+        </p:spPr>
+      </p:sp>
+      <p:sp>
+        <p:nvSpPr>
+          <p:cNvPr id="20" name="Shape 18"/>
+          <p:cNvSpPr/>
+          <p:nvPr/>
+        </p:nvSpPr>
+        <p:spPr>
+          <a:xfrm>
+            <a:off x="484632" y="3895344"/>
+            <a:ext cx="164592" cy="164592"/>
+          </a:xfrm>
+          <a:prstGeom prst="ellipse">
+            <a:avLst/>
+          </a:prstGeom>
+          <a:solidFill>
+            <a:srgbClr val="2563EB"/>
+          </a:solidFill>
+          <a:ln w="12700">
+            <a:solidFill>
+              <a:srgbClr val="2563EB"/>
+            </a:solidFill>
+            <a:prstDash val="solid"/>
+          </a:ln>
+        </p:spPr>
+      </p:sp>
+      <p:sp>
+        <p:nvSpPr>
+          <p:cNvPr id="21" name="Text 19"/>
+          <p:cNvSpPr/>
+          <p:nvPr/>
+        </p:nvSpPr>
+        <p:spPr>
+          <a:xfrm>
+            <a:off x="713232" y="3813048"/>
+            <a:ext cx="2240280" cy="420624"/>
+          </a:xfrm>
+          <a:prstGeom prst="rect">
+            <a:avLst/>
+          </a:prstGeom>
+          <a:noFill/>
+          <a:ln/>
+        </p:spPr>
+        <p:txBody>
+          <a:bodyPr wrap="square" lIns="0" tIns="0" rIns="0" bIns="0" rtlCol="0" anchor="ctr"/>
+          <a:lstStyle/>
+          <a:p>
+            <a:pPr marL="0" indent="0">
+              <a:buNone/>
+            </a:pPr>
+            <a:r>
+              <a:rPr lang="en-US" sz="1150" dirty="0" err="1">
+                <a:solidFill>
+                  <a:srgbClr val="374151"/>
+                </a:solidFill>
+                <a:latin typeface="Calibri" pitchFamily="34" charset="0"/>
+                <a:ea typeface="Calibri" pitchFamily="34" charset="-122"/>
+                <a:cs typeface="Calibri" pitchFamily="34" charset="-120"/>
+              </a:rPr>
+              <a:t>Presentazione</a:t>
+            </a:r>
+            <a:r>
+              <a:rPr lang="en-US" sz="1150" dirty="0">
+                <a:solidFill>
+                  <a:srgbClr val="374151"/>
+                </a:solidFill>
+                <a:latin typeface="Calibri" pitchFamily="34" charset="0"/>
+                <a:ea typeface="Calibri" pitchFamily="34" charset="-122"/>
+                <a:cs typeface="Calibri" pitchFamily="34" charset="-120"/>
+              </a:rPr>
+              <a:t> (Demo e PowerPoint)</a:t>
+            </a:r>
+            <a:endParaRPr lang="en-US" sz="1150" dirty="0"/>
+          </a:p>
+        </p:txBody>
+      </p:sp>
+      <p:sp>
+        <p:nvSpPr>
+          <p:cNvPr id="22" name="Shape 20"/>
+          <p:cNvSpPr/>
+          <p:nvPr/>
+        </p:nvSpPr>
+        <p:spPr>
+          <a:xfrm>
+            <a:off x="484632" y="4251960"/>
+            <a:ext cx="2468880" cy="9144"/>
+          </a:xfrm>
+          <a:prstGeom prst="rect">
+            <a:avLst/>
+          </a:prstGeom>
+          <a:solidFill>
+            <a:srgbClr val="E5E7EB"/>
+          </a:solidFill>
+          <a:ln w="12700">
+            <a:solidFill>
+              <a:srgbClr val="E5E7EB"/>
+            </a:solidFill>
+            <a:prstDash val="solid"/>
+          </a:ln>
+        </p:spPr>
+      </p:sp>
+      <p:sp>
+        <p:nvSpPr>
+          <p:cNvPr id="24" name="Text 22"/>
+          <p:cNvSpPr/>
+          <p:nvPr/>
+        </p:nvSpPr>
+        <p:spPr>
+          <a:xfrm>
+            <a:off x="713232" y="4270248"/>
+            <a:ext cx="2240280" cy="420624"/>
+          </a:xfrm>
+          <a:prstGeom prst="rect">
+            <a:avLst/>
+          </a:prstGeom>
+          <a:noFill/>
+          <a:ln/>
+        </p:spPr>
+        <p:txBody>
+          <a:bodyPr wrap="square" lIns="0" tIns="0" rIns="0" bIns="0" rtlCol="0" anchor="ctr"/>
+          <a:lstStyle/>
+          <a:p>
+            <a:pPr marL="0" indent="0">
+              <a:buNone/>
+            </a:pPr>
+            <a:endParaRPr lang="en-US" sz="1150" dirty="0"/>
+          </a:p>
+        </p:txBody>
+      </p:sp>
+      <p:sp>
+        <p:nvSpPr>
+          <p:cNvPr id="25" name="Shape 23"/>
+          <p:cNvSpPr/>
+          <p:nvPr/>
+        </p:nvSpPr>
+        <p:spPr>
+          <a:xfrm>
+            <a:off x="3200400" y="1232916"/>
+            <a:ext cx="2743200" cy="3566160"/>
+          </a:xfrm>
+          <a:prstGeom prst="roundRect">
+            <a:avLst>
+              <a:gd name="adj" fmla="val 4667"/>
+            </a:avLst>
+          </a:prstGeom>
+          <a:solidFill>
+            <a:srgbClr val="FFFFFF"/>
+          </a:solidFill>
+          <a:ln w="12700">
+            <a:solidFill>
+              <a:srgbClr val="E5E7EB"/>
+            </a:solidFill>
+            <a:prstDash val="solid"/>
+          </a:ln>
+          <a:effectLst>
+            <a:outerShdw blurRad="101600" dist="38100" dir="2700000" algn="bl" rotWithShape="0">
+              <a:srgbClr val="000000">
+                <a:alpha val="10000"/>
+              </a:srgbClr>
+            </a:outerShdw>
+          </a:effectLst>
+        </p:spPr>
+        <p:txBody>
+          <a:bodyPr/>
+          <a:lstStyle/>
+          <a:p>
+            <a:endParaRPr lang="it-CH"/>
+          </a:p>
+        </p:txBody>
+      </p:sp>
+      <p:sp>
+        <p:nvSpPr>
+          <p:cNvPr id="26" name="Shape 24"/>
+          <p:cNvSpPr/>
+          <p:nvPr/>
+        </p:nvSpPr>
+        <p:spPr>
+          <a:xfrm>
+            <a:off x="3200400" y="1234440"/>
+            <a:ext cx="2743200" cy="621792"/>
+          </a:xfrm>
+          <a:prstGeom prst="roundRect">
+            <a:avLst>
+              <a:gd name="adj" fmla="val 20588"/>
+            </a:avLst>
+          </a:prstGeom>
+          <a:solidFill>
+            <a:srgbClr val="059669"/>
+          </a:solidFill>
+          <a:ln w="12700">
+            <a:solidFill>
+              <a:srgbClr val="059669"/>
+            </a:solidFill>
+            <a:prstDash val="solid"/>
+          </a:ln>
+        </p:spPr>
+      </p:sp>
+      <p:sp>
+        <p:nvSpPr>
+          <p:cNvPr id="27" name="Shape 25"/>
+          <p:cNvSpPr/>
+          <p:nvPr/>
+        </p:nvSpPr>
+        <p:spPr>
+          <a:xfrm>
+            <a:off x="3200400" y="1600200"/>
+            <a:ext cx="2743200" cy="256032"/>
+          </a:xfrm>
+          <a:prstGeom prst="rect">
+            <a:avLst/>
+          </a:prstGeom>
+          <a:solidFill>
+            <a:srgbClr val="059669"/>
+          </a:solidFill>
+          <a:ln w="12700">
+            <a:solidFill>
+              <a:srgbClr val="059669"/>
+            </a:solidFill>
+            <a:prstDash val="solid"/>
+          </a:ln>
+        </p:spPr>
+      </p:sp>
+      <p:sp>
+        <p:nvSpPr>
+          <p:cNvPr id="28" name="Text 26"/>
+          <p:cNvSpPr/>
+          <p:nvPr/>
+        </p:nvSpPr>
+        <p:spPr>
+          <a:xfrm>
+            <a:off x="3337560" y="1344168"/>
+            <a:ext cx="2468880" cy="402336"/>
+          </a:xfrm>
+          <a:prstGeom prst="rect">
+            <a:avLst/>
+          </a:prstGeom>
+          <a:noFill/>
+          <a:ln/>
+        </p:spPr>
+        <p:txBody>
+          <a:bodyPr wrap="square" lIns="0" tIns="0" rIns="0" bIns="0" rtlCol="0" anchor="ctr"/>
+          <a:lstStyle/>
+          <a:p>
+            <a:pPr marL="0" indent="0" algn="ctr">
+              <a:buNone/>
+            </a:pPr>
+            <a:r>
+              <a:rPr lang="en-US" sz="1800" b="1" dirty="0">
+                <a:solidFill>
+                  <a:srgbClr val="FFFFFF"/>
+                </a:solidFill>
+                <a:latin typeface="Calibri" pitchFamily="34" charset="0"/>
+                <a:ea typeface="Calibri" pitchFamily="34" charset="-122"/>
+                <a:cs typeface="Calibri" pitchFamily="34" charset="-120"/>
+              </a:rPr>
+              <a:t>Mateo (Developer)</a:t>
+            </a:r>
+            <a:endParaRPr lang="en-US" sz="1800" dirty="0"/>
+          </a:p>
+        </p:txBody>
+      </p:sp>
+      <p:sp>
+        <p:nvSpPr>
+          <p:cNvPr id="29" name="Shape 27"/>
+          <p:cNvSpPr/>
+          <p:nvPr/>
+        </p:nvSpPr>
+        <p:spPr>
+          <a:xfrm>
+            <a:off x="3337560" y="2066544"/>
+            <a:ext cx="164592" cy="164592"/>
+          </a:xfrm>
+          <a:prstGeom prst="ellipse">
+            <a:avLst/>
+          </a:prstGeom>
+          <a:solidFill>
+            <a:srgbClr val="059669"/>
+          </a:solidFill>
+          <a:ln w="12700">
+            <a:solidFill>
+              <a:srgbClr val="059669"/>
+            </a:solidFill>
+            <a:prstDash val="solid"/>
+          </a:ln>
+        </p:spPr>
+      </p:sp>
+      <p:sp>
+        <p:nvSpPr>
+          <p:cNvPr id="30" name="Text 28"/>
+          <p:cNvSpPr/>
+          <p:nvPr/>
+        </p:nvSpPr>
+        <p:spPr>
+          <a:xfrm>
+            <a:off x="3598164" y="3355848"/>
+            <a:ext cx="2240280" cy="420624"/>
+          </a:xfrm>
+          <a:prstGeom prst="rect">
+            <a:avLst/>
+          </a:prstGeom>
+          <a:noFill/>
+          <a:ln/>
+        </p:spPr>
+        <p:txBody>
+          <a:bodyPr wrap="square" lIns="0" tIns="0" rIns="0" bIns="0" rtlCol="0" anchor="ctr"/>
+          <a:lstStyle/>
+          <a:p>
+            <a:pPr marL="0" indent="0">
+              <a:buNone/>
+            </a:pPr>
+            <a:r>
+              <a:rPr lang="en-US" sz="1150" dirty="0" err="1">
+                <a:solidFill>
+                  <a:srgbClr val="374151"/>
+                </a:solidFill>
+                <a:latin typeface="Calibri" pitchFamily="34" charset="0"/>
+                <a:ea typeface="Calibri" pitchFamily="34" charset="-122"/>
+                <a:cs typeface="Calibri" pitchFamily="34" charset="-120"/>
+              </a:rPr>
+              <a:t>Pagina</a:t>
+            </a:r>
+            <a:r>
+              <a:rPr lang="en-US" sz="1150" dirty="0">
+                <a:solidFill>
+                  <a:srgbClr val="374151"/>
+                </a:solidFill>
+                <a:latin typeface="Calibri" pitchFamily="34" charset="0"/>
+                <a:ea typeface="Calibri" pitchFamily="34" charset="-122"/>
+                <a:cs typeface="Calibri" pitchFamily="34" charset="-120"/>
+              </a:rPr>
+              <a:t> </a:t>
+            </a:r>
+            <a:r>
+              <a:rPr lang="en-US" sz="1150" dirty="0" err="1">
+                <a:solidFill>
+                  <a:srgbClr val="374151"/>
+                </a:solidFill>
+                <a:latin typeface="Calibri" pitchFamily="34" charset="0"/>
+                <a:ea typeface="Calibri" pitchFamily="34" charset="-122"/>
+                <a:cs typeface="Calibri" pitchFamily="34" charset="-120"/>
+              </a:rPr>
+              <a:t>Attività</a:t>
+            </a:r>
+            <a:r>
+              <a:rPr lang="en-US" sz="1150" dirty="0">
+                <a:solidFill>
+                  <a:srgbClr val="374151"/>
+                </a:solidFill>
+                <a:latin typeface="Calibri" pitchFamily="34" charset="0"/>
+                <a:ea typeface="Calibri" pitchFamily="34" charset="-122"/>
+                <a:cs typeface="Calibri" pitchFamily="34" charset="-120"/>
+              </a:rPr>
+              <a:t> (</a:t>
+            </a:r>
+            <a:r>
+              <a:rPr lang="en-US" sz="1150" dirty="0" err="1">
+                <a:solidFill>
+                  <a:srgbClr val="374151"/>
+                </a:solidFill>
+                <a:latin typeface="Calibri" pitchFamily="34" charset="0"/>
+                <a:ea typeface="Calibri" pitchFamily="34" charset="-122"/>
+                <a:cs typeface="Calibri" pitchFamily="34" charset="-120"/>
+              </a:rPr>
+              <a:t>Pianificazioni</a:t>
+            </a:r>
+            <a:r>
+              <a:rPr lang="en-US" sz="1150" dirty="0">
+                <a:solidFill>
+                  <a:srgbClr val="374151"/>
+                </a:solidFill>
+                <a:latin typeface="Calibri" pitchFamily="34" charset="0"/>
+                <a:ea typeface="Calibri" pitchFamily="34" charset="-122"/>
+                <a:cs typeface="Calibri" pitchFamily="34" charset="-120"/>
+              </a:rPr>
+              <a:t>)</a:t>
+            </a:r>
+            <a:endParaRPr lang="en-US" sz="1150" dirty="0"/>
+          </a:p>
+        </p:txBody>
+      </p:sp>
+      <p:sp>
+        <p:nvSpPr>
+          <p:cNvPr id="31" name="Shape 29"/>
+          <p:cNvSpPr/>
+          <p:nvPr/>
+        </p:nvSpPr>
+        <p:spPr>
+          <a:xfrm>
+            <a:off x="3337560" y="2423160"/>
+            <a:ext cx="2468880" cy="9144"/>
+          </a:xfrm>
+          <a:prstGeom prst="rect">
+            <a:avLst/>
+          </a:prstGeom>
+          <a:solidFill>
+            <a:srgbClr val="E5E7EB"/>
+          </a:solidFill>
+          <a:ln w="12700">
+            <a:solidFill>
+              <a:srgbClr val="E5E7EB"/>
+            </a:solidFill>
+            <a:prstDash val="solid"/>
+          </a:ln>
+        </p:spPr>
+      </p:sp>
+      <p:sp>
+        <p:nvSpPr>
+          <p:cNvPr id="32" name="Shape 30"/>
+          <p:cNvSpPr/>
+          <p:nvPr/>
+        </p:nvSpPr>
+        <p:spPr>
+          <a:xfrm>
+            <a:off x="3337560" y="2523744"/>
+            <a:ext cx="164592" cy="164592"/>
+          </a:xfrm>
+          <a:prstGeom prst="ellipse">
+            <a:avLst/>
+          </a:prstGeom>
+          <a:solidFill>
+            <a:srgbClr val="059669"/>
+          </a:solidFill>
+          <a:ln w="12700">
+            <a:solidFill>
+              <a:srgbClr val="059669"/>
+            </a:solidFill>
+            <a:prstDash val="solid"/>
+          </a:ln>
+        </p:spPr>
+      </p:sp>
+      <p:sp>
+        <p:nvSpPr>
+          <p:cNvPr id="33" name="Text 31"/>
+          <p:cNvSpPr/>
+          <p:nvPr/>
+        </p:nvSpPr>
+        <p:spPr>
+          <a:xfrm>
+            <a:off x="3584448" y="2921508"/>
+            <a:ext cx="2240280" cy="420624"/>
+          </a:xfrm>
+          <a:prstGeom prst="rect">
+            <a:avLst/>
+          </a:prstGeom>
+          <a:noFill/>
+          <a:ln/>
+        </p:spPr>
+        <p:txBody>
+          <a:bodyPr wrap="square" lIns="0" tIns="0" rIns="0" bIns="0" rtlCol="0" anchor="ctr"/>
+          <a:lstStyle/>
+          <a:p>
+            <a:pPr marL="0" indent="0">
+              <a:buNone/>
+            </a:pPr>
+            <a:r>
+              <a:rPr lang="en-US" sz="1150" dirty="0" err="1">
+                <a:solidFill>
+                  <a:srgbClr val="374151"/>
+                </a:solidFill>
+                <a:latin typeface="Calibri" pitchFamily="34" charset="0"/>
+                <a:ea typeface="Calibri" pitchFamily="34" charset="-122"/>
+                <a:cs typeface="Calibri" pitchFamily="34" charset="-120"/>
+              </a:rPr>
+              <a:t>Pagina</a:t>
+            </a:r>
+            <a:r>
+              <a:rPr lang="en-US" sz="1150" dirty="0">
+                <a:solidFill>
+                  <a:srgbClr val="374151"/>
+                </a:solidFill>
+                <a:latin typeface="Calibri" pitchFamily="34" charset="0"/>
+                <a:ea typeface="Calibri" pitchFamily="34" charset="-122"/>
+                <a:cs typeface="Calibri" pitchFamily="34" charset="-120"/>
+              </a:rPr>
+              <a:t> </a:t>
+            </a:r>
+            <a:r>
+              <a:rPr lang="en-US" sz="1150" dirty="0" err="1">
+                <a:solidFill>
+                  <a:srgbClr val="374151"/>
+                </a:solidFill>
+                <a:latin typeface="Calibri" pitchFamily="34" charset="0"/>
+                <a:ea typeface="Calibri" pitchFamily="34" charset="-122"/>
+                <a:cs typeface="Calibri" pitchFamily="34" charset="-120"/>
+              </a:rPr>
+              <a:t>Scuola</a:t>
+            </a:r>
+            <a:r>
+              <a:rPr lang="en-US" sz="1150" dirty="0">
+                <a:solidFill>
+                  <a:srgbClr val="374151"/>
+                </a:solidFill>
+                <a:latin typeface="Calibri" pitchFamily="34" charset="0"/>
+                <a:ea typeface="Calibri" pitchFamily="34" charset="-122"/>
+                <a:cs typeface="Calibri" pitchFamily="34" charset="-120"/>
+              </a:rPr>
+              <a:t>(</a:t>
+            </a:r>
+            <a:r>
+              <a:rPr lang="en-US" sz="1150" dirty="0" err="1">
+                <a:solidFill>
+                  <a:srgbClr val="374151"/>
+                </a:solidFill>
+                <a:latin typeface="Calibri" pitchFamily="34" charset="0"/>
+                <a:ea typeface="Calibri" pitchFamily="34" charset="-122"/>
+                <a:cs typeface="Calibri" pitchFamily="34" charset="-120"/>
+              </a:rPr>
+              <a:t>Materie</a:t>
+            </a:r>
+            <a:r>
+              <a:rPr lang="en-US" sz="1150" dirty="0">
+                <a:solidFill>
+                  <a:srgbClr val="374151"/>
+                </a:solidFill>
+                <a:latin typeface="Calibri" pitchFamily="34" charset="0"/>
+                <a:ea typeface="Calibri" pitchFamily="34" charset="-122"/>
+                <a:cs typeface="Calibri" pitchFamily="34" charset="-120"/>
+              </a:rPr>
+              <a:t> e </a:t>
+            </a:r>
+            <a:r>
+              <a:rPr lang="en-US" sz="1150" dirty="0" err="1">
+                <a:solidFill>
+                  <a:srgbClr val="374151"/>
+                </a:solidFill>
+                <a:latin typeface="Calibri" pitchFamily="34" charset="0"/>
+                <a:ea typeface="Calibri" pitchFamily="34" charset="-122"/>
+                <a:cs typeface="Calibri" pitchFamily="34" charset="-120"/>
+              </a:rPr>
+              <a:t>voti</a:t>
+            </a:r>
+            <a:r>
+              <a:rPr lang="en-US" sz="1150" dirty="0">
+                <a:solidFill>
+                  <a:srgbClr val="374151"/>
+                </a:solidFill>
+                <a:latin typeface="Calibri" pitchFamily="34" charset="0"/>
+                <a:ea typeface="Calibri" pitchFamily="34" charset="-122"/>
+                <a:cs typeface="Calibri" pitchFamily="34" charset="-120"/>
+              </a:rPr>
+              <a:t>)</a:t>
+            </a:r>
+            <a:endParaRPr lang="en-US" sz="1150" dirty="0"/>
+          </a:p>
+        </p:txBody>
+      </p:sp>
+      <p:sp>
+        <p:nvSpPr>
+          <p:cNvPr id="34" name="Shape 32"/>
+          <p:cNvSpPr/>
+          <p:nvPr/>
+        </p:nvSpPr>
+        <p:spPr>
+          <a:xfrm>
+            <a:off x="3337560" y="2880360"/>
+            <a:ext cx="2468880" cy="9144"/>
+          </a:xfrm>
+          <a:prstGeom prst="rect">
+            <a:avLst/>
+          </a:prstGeom>
+          <a:solidFill>
+            <a:srgbClr val="E5E7EB"/>
+          </a:solidFill>
+          <a:ln w="12700">
+            <a:solidFill>
+              <a:srgbClr val="E5E7EB"/>
+            </a:solidFill>
+            <a:prstDash val="solid"/>
+          </a:ln>
+        </p:spPr>
+      </p:sp>
+      <p:sp>
+        <p:nvSpPr>
+          <p:cNvPr id="35" name="Shape 33"/>
+          <p:cNvSpPr/>
+          <p:nvPr/>
+        </p:nvSpPr>
+        <p:spPr>
+          <a:xfrm>
+            <a:off x="3337560" y="2980944"/>
+            <a:ext cx="164592" cy="164592"/>
+          </a:xfrm>
+          <a:prstGeom prst="ellipse">
+            <a:avLst/>
+          </a:prstGeom>
+          <a:solidFill>
+            <a:srgbClr val="059669"/>
+          </a:solidFill>
+          <a:ln w="12700">
+            <a:solidFill>
+              <a:srgbClr val="059669"/>
+            </a:solidFill>
+            <a:prstDash val="solid"/>
+          </a:ln>
+        </p:spPr>
+      </p:sp>
+      <p:sp>
+        <p:nvSpPr>
+          <p:cNvPr id="36" name="Text 34"/>
+          <p:cNvSpPr/>
+          <p:nvPr/>
+        </p:nvSpPr>
+        <p:spPr>
+          <a:xfrm>
+            <a:off x="3598164" y="2450592"/>
+            <a:ext cx="2240280" cy="420624"/>
+          </a:xfrm>
+          <a:prstGeom prst="rect">
+            <a:avLst/>
+          </a:prstGeom>
+          <a:noFill/>
+          <a:ln/>
+        </p:spPr>
+        <p:txBody>
+          <a:bodyPr wrap="square" lIns="0" tIns="0" rIns="0" bIns="0" rtlCol="0" anchor="ctr"/>
+          <a:lstStyle/>
+          <a:p>
+            <a:pPr marL="0" indent="0">
+              <a:buNone/>
+            </a:pPr>
+            <a:r>
+              <a:rPr lang="en-US" sz="1150" dirty="0" err="1">
+                <a:solidFill>
+                  <a:srgbClr val="374151"/>
+                </a:solidFill>
+                <a:latin typeface="Calibri" pitchFamily="34" charset="0"/>
+                <a:ea typeface="Calibri" pitchFamily="34" charset="-122"/>
+                <a:cs typeface="Calibri" pitchFamily="34" charset="-120"/>
+              </a:rPr>
+              <a:t>Pagine</a:t>
+            </a:r>
+            <a:r>
+              <a:rPr lang="en-US" sz="1150" dirty="0">
+                <a:solidFill>
+                  <a:srgbClr val="374151"/>
+                </a:solidFill>
+                <a:latin typeface="Calibri" pitchFamily="34" charset="0"/>
+                <a:ea typeface="Calibri" pitchFamily="34" charset="-122"/>
+                <a:cs typeface="Calibri" pitchFamily="34" charset="-120"/>
+              </a:rPr>
+              <a:t> Home</a:t>
+            </a:r>
+            <a:endParaRPr lang="en-US" sz="1150" dirty="0"/>
+          </a:p>
+        </p:txBody>
+      </p:sp>
+      <p:sp>
+        <p:nvSpPr>
+          <p:cNvPr id="37" name="Shape 35"/>
+          <p:cNvSpPr/>
+          <p:nvPr/>
+        </p:nvSpPr>
+        <p:spPr>
+          <a:xfrm>
+            <a:off x="3337560" y="3337560"/>
+            <a:ext cx="2468880" cy="9144"/>
+          </a:xfrm>
+          <a:prstGeom prst="rect">
+            <a:avLst/>
+          </a:prstGeom>
+          <a:solidFill>
+            <a:srgbClr val="E5E7EB"/>
+          </a:solidFill>
+          <a:ln w="12700">
+            <a:solidFill>
+              <a:srgbClr val="E5E7EB"/>
+            </a:solidFill>
+            <a:prstDash val="solid"/>
+          </a:ln>
+        </p:spPr>
+      </p:sp>
+      <p:sp>
+        <p:nvSpPr>
+          <p:cNvPr id="38" name="Shape 36"/>
+          <p:cNvSpPr/>
+          <p:nvPr/>
+        </p:nvSpPr>
+        <p:spPr>
+          <a:xfrm>
+            <a:off x="3337560" y="3438144"/>
+            <a:ext cx="164592" cy="164592"/>
+          </a:xfrm>
+          <a:prstGeom prst="ellipse">
+            <a:avLst/>
+          </a:prstGeom>
+          <a:solidFill>
+            <a:srgbClr val="059669"/>
+          </a:solidFill>
+          <a:ln w="12700">
+            <a:solidFill>
+              <a:srgbClr val="059669"/>
+            </a:solidFill>
+            <a:prstDash val="solid"/>
+          </a:ln>
+        </p:spPr>
+      </p:sp>
+      <p:sp>
+        <p:nvSpPr>
+          <p:cNvPr id="39" name="Text 37"/>
+          <p:cNvSpPr/>
+          <p:nvPr/>
+        </p:nvSpPr>
+        <p:spPr>
+          <a:xfrm>
+            <a:off x="3566160" y="3355848"/>
+            <a:ext cx="2240280" cy="420624"/>
+          </a:xfrm>
+          <a:prstGeom prst="rect">
+            <a:avLst/>
+          </a:prstGeom>
+          <a:noFill/>
+          <a:ln/>
+        </p:spPr>
+        <p:txBody>
+          <a:bodyPr wrap="square" lIns="0" tIns="0" rIns="0" bIns="0" rtlCol="0" anchor="ctr"/>
+          <a:lstStyle/>
+          <a:p>
+            <a:pPr marL="0" indent="0">
+              <a:buNone/>
+            </a:pPr>
+            <a:endParaRPr lang="en-US" sz="1150" dirty="0"/>
+          </a:p>
+        </p:txBody>
+      </p:sp>
+      <p:sp>
+        <p:nvSpPr>
+          <p:cNvPr id="40" name="Shape 38"/>
+          <p:cNvSpPr/>
+          <p:nvPr/>
+        </p:nvSpPr>
+        <p:spPr>
+          <a:xfrm>
+            <a:off x="3337560" y="3794760"/>
+            <a:ext cx="2468880" cy="9144"/>
+          </a:xfrm>
+          <a:prstGeom prst="rect">
+            <a:avLst/>
+          </a:prstGeom>
+          <a:solidFill>
+            <a:srgbClr val="E5E7EB"/>
+          </a:solidFill>
+          <a:ln w="12700">
+            <a:solidFill>
+              <a:srgbClr val="E5E7EB"/>
+            </a:solidFill>
+            <a:prstDash val="solid"/>
+          </a:ln>
+        </p:spPr>
+      </p:sp>
+      <p:sp>
+        <p:nvSpPr>
+          <p:cNvPr id="41" name="Shape 39"/>
+          <p:cNvSpPr/>
+          <p:nvPr/>
+        </p:nvSpPr>
+        <p:spPr>
+          <a:xfrm>
+            <a:off x="3337560" y="3895344"/>
+            <a:ext cx="164592" cy="164592"/>
+          </a:xfrm>
+          <a:prstGeom prst="ellipse">
+            <a:avLst/>
+          </a:prstGeom>
+          <a:solidFill>
+            <a:srgbClr val="059669"/>
+          </a:solidFill>
+          <a:ln w="12700">
+            <a:solidFill>
+              <a:srgbClr val="059669"/>
+            </a:solidFill>
+            <a:prstDash val="solid"/>
+          </a:ln>
+        </p:spPr>
+      </p:sp>
+      <p:sp>
+        <p:nvSpPr>
+          <p:cNvPr id="42" name="Text 40"/>
+          <p:cNvSpPr/>
+          <p:nvPr/>
+        </p:nvSpPr>
+        <p:spPr>
+          <a:xfrm>
+            <a:off x="3566160" y="3813048"/>
+            <a:ext cx="2240280" cy="420624"/>
+          </a:xfrm>
+          <a:prstGeom prst="rect">
+            <a:avLst/>
+          </a:prstGeom>
+          <a:noFill/>
+          <a:ln/>
+        </p:spPr>
+        <p:txBody>
+          <a:bodyPr wrap="square" lIns="0" tIns="0" rIns="0" bIns="0" rtlCol="0" anchor="ctr"/>
+          <a:lstStyle/>
+          <a:p>
+            <a:pPr marL="0" indent="0">
+              <a:buNone/>
+            </a:pPr>
+            <a:endParaRPr lang="en-US" sz="1150" dirty="0"/>
+          </a:p>
+        </p:txBody>
+      </p:sp>
+      <p:sp>
+        <p:nvSpPr>
+          <p:cNvPr id="43" name="Shape 41"/>
+          <p:cNvSpPr/>
+          <p:nvPr/>
+        </p:nvSpPr>
+        <p:spPr>
+          <a:xfrm>
+            <a:off x="3337560" y="4251960"/>
+            <a:ext cx="2468880" cy="9144"/>
+          </a:xfrm>
+          <a:prstGeom prst="rect">
+            <a:avLst/>
+          </a:prstGeom>
+          <a:solidFill>
+            <a:srgbClr val="E5E7EB"/>
+          </a:solidFill>
+          <a:ln w="12700">
+            <a:solidFill>
+              <a:srgbClr val="E5E7EB"/>
+            </a:solidFill>
+            <a:prstDash val="solid"/>
+          </a:ln>
+        </p:spPr>
+      </p:sp>
+      <p:sp>
+        <p:nvSpPr>
+          <p:cNvPr id="45" name="Text 43"/>
+          <p:cNvSpPr/>
+          <p:nvPr/>
+        </p:nvSpPr>
+        <p:spPr>
+          <a:xfrm>
+            <a:off x="3566160" y="4270248"/>
+            <a:ext cx="2240280" cy="420624"/>
+          </a:xfrm>
+          <a:prstGeom prst="rect">
+            <a:avLst/>
+          </a:prstGeom>
+          <a:noFill/>
+          <a:ln/>
+        </p:spPr>
+        <p:txBody>
+          <a:bodyPr wrap="square" lIns="0" tIns="0" rIns="0" bIns="0" rtlCol="0" anchor="ctr"/>
+          <a:lstStyle/>
+          <a:p>
+            <a:pPr marL="0" indent="0">
+              <a:buNone/>
+            </a:pPr>
+            <a:endParaRPr lang="en-US" sz="1150" dirty="0"/>
+          </a:p>
+        </p:txBody>
+      </p:sp>
+      <p:sp>
+        <p:nvSpPr>
+          <p:cNvPr id="46" name="Shape 44"/>
+          <p:cNvSpPr/>
+          <p:nvPr/>
+        </p:nvSpPr>
+        <p:spPr>
+          <a:xfrm>
+            <a:off x="6053328" y="1234440"/>
+            <a:ext cx="2743200" cy="3566160"/>
+          </a:xfrm>
+          <a:prstGeom prst="roundRect">
+            <a:avLst>
+              <a:gd name="adj" fmla="val 4667"/>
+            </a:avLst>
+          </a:prstGeom>
+          <a:solidFill>
+            <a:srgbClr val="FFFFFF"/>
+          </a:solidFill>
+          <a:ln w="12700">
+            <a:solidFill>
+              <a:srgbClr val="E5E7EB"/>
+            </a:solidFill>
+            <a:prstDash val="solid"/>
+          </a:ln>
+          <a:effectLst>
+            <a:outerShdw blurRad="101600" dist="38100" dir="2700000" algn="bl" rotWithShape="0">
+              <a:srgbClr val="000000">
+                <a:alpha val="10000"/>
+              </a:srgbClr>
+            </a:outerShdw>
+          </a:effectLst>
+        </p:spPr>
+      </p:sp>
+      <p:sp>
+        <p:nvSpPr>
+          <p:cNvPr id="47" name="Shape 45"/>
+          <p:cNvSpPr/>
+          <p:nvPr/>
+        </p:nvSpPr>
+        <p:spPr>
+          <a:xfrm>
+            <a:off x="6053328" y="1234440"/>
+            <a:ext cx="2743200" cy="621792"/>
+          </a:xfrm>
+          <a:prstGeom prst="roundRect">
+            <a:avLst>
+              <a:gd name="adj" fmla="val 20588"/>
+            </a:avLst>
+          </a:prstGeom>
+          <a:solidFill>
+            <a:srgbClr val="7C3AED"/>
+          </a:solidFill>
+          <a:ln w="12700">
+            <a:solidFill>
+              <a:srgbClr val="7C3AED"/>
+            </a:solidFill>
+            <a:prstDash val="solid"/>
+          </a:ln>
+        </p:spPr>
+      </p:sp>
+      <p:sp>
+        <p:nvSpPr>
+          <p:cNvPr id="48" name="Shape 46"/>
+          <p:cNvSpPr/>
+          <p:nvPr/>
+        </p:nvSpPr>
+        <p:spPr>
+          <a:xfrm>
+            <a:off x="6053328" y="1600200"/>
+            <a:ext cx="2743200" cy="256032"/>
+          </a:xfrm>
+          <a:prstGeom prst="rect">
+            <a:avLst/>
+          </a:prstGeom>
+          <a:solidFill>
+            <a:srgbClr val="7C3AED"/>
+          </a:solidFill>
+          <a:ln w="12700">
+            <a:solidFill>
+              <a:srgbClr val="7C3AED"/>
+            </a:solidFill>
+            <a:prstDash val="solid"/>
+          </a:ln>
+        </p:spPr>
+      </p:sp>
+      <p:sp>
+        <p:nvSpPr>
+          <p:cNvPr id="49" name="Text 47"/>
+          <p:cNvSpPr/>
+          <p:nvPr/>
+        </p:nvSpPr>
+        <p:spPr>
+          <a:xfrm>
+            <a:off x="6190488" y="1344168"/>
+            <a:ext cx="2468880" cy="402336"/>
+          </a:xfrm>
+          <a:prstGeom prst="rect">
+            <a:avLst/>
+          </a:prstGeom>
+          <a:noFill/>
+          <a:ln/>
+        </p:spPr>
+        <p:txBody>
+          <a:bodyPr wrap="square" lIns="0" tIns="0" rIns="0" bIns="0" rtlCol="0" anchor="ctr"/>
+          <a:lstStyle/>
+          <a:p>
+            <a:pPr marL="0" indent="0" algn="ctr">
+              <a:buNone/>
+            </a:pPr>
+            <a:r>
+              <a:rPr lang="en-US" sz="1800" b="1" dirty="0">
+                <a:solidFill>
+                  <a:srgbClr val="FFFFFF"/>
+                </a:solidFill>
+                <a:latin typeface="Calibri" pitchFamily="34" charset="0"/>
+                <a:ea typeface="Calibri" pitchFamily="34" charset="-122"/>
+                <a:cs typeface="Calibri" pitchFamily="34" charset="-120"/>
+              </a:rPr>
+              <a:t>Matteo (</a:t>
+            </a:r>
+            <a:r>
+              <a:rPr lang="en-US" sz="1800" b="1" dirty="0" err="1">
+                <a:solidFill>
+                  <a:srgbClr val="FFFFFF"/>
+                </a:solidFill>
+                <a:latin typeface="Calibri" pitchFamily="34" charset="0"/>
+                <a:ea typeface="Calibri" pitchFamily="34" charset="-122"/>
+                <a:cs typeface="Calibri" pitchFamily="34" charset="-120"/>
+              </a:rPr>
+              <a:t>Assistent</a:t>
+            </a:r>
+            <a:r>
+              <a:rPr lang="en-US" sz="1800" b="1" dirty="0">
+                <a:solidFill>
+                  <a:srgbClr val="FFFFFF"/>
+                </a:solidFill>
+                <a:latin typeface="Calibri" pitchFamily="34" charset="0"/>
+                <a:ea typeface="Calibri" pitchFamily="34" charset="-122"/>
+                <a:cs typeface="Calibri" pitchFamily="34" charset="-120"/>
+              </a:rPr>
+              <a:t>)</a:t>
+            </a:r>
+            <a:endParaRPr lang="en-US" sz="1800" dirty="0"/>
+          </a:p>
+        </p:txBody>
+      </p:sp>
+      <p:sp>
+        <p:nvSpPr>
+          <p:cNvPr id="50" name="Shape 48"/>
+          <p:cNvSpPr/>
+          <p:nvPr/>
+        </p:nvSpPr>
+        <p:spPr>
+          <a:xfrm>
+            <a:off x="6190488" y="2066544"/>
+            <a:ext cx="164592" cy="164592"/>
+          </a:xfrm>
+          <a:prstGeom prst="ellipse">
+            <a:avLst/>
+          </a:prstGeom>
+          <a:solidFill>
+            <a:srgbClr val="7C3AED"/>
+          </a:solidFill>
+          <a:ln w="12700">
+            <a:solidFill>
+              <a:srgbClr val="7C3AED"/>
+            </a:solidFill>
+            <a:prstDash val="solid"/>
+          </a:ln>
+        </p:spPr>
+      </p:sp>
+      <p:sp>
+        <p:nvSpPr>
+          <p:cNvPr id="51" name="Text 49"/>
+          <p:cNvSpPr/>
+          <p:nvPr/>
+        </p:nvSpPr>
+        <p:spPr>
+          <a:xfrm>
+            <a:off x="6464808" y="2423160"/>
+            <a:ext cx="2240280" cy="420624"/>
+          </a:xfrm>
+          <a:prstGeom prst="rect">
+            <a:avLst/>
+          </a:prstGeom>
+          <a:noFill/>
+          <a:ln/>
+        </p:spPr>
+        <p:txBody>
+          <a:bodyPr wrap="square" lIns="0" tIns="0" rIns="0" bIns="0" rtlCol="0" anchor="ctr"/>
+          <a:lstStyle/>
+          <a:p>
+            <a:pPr marL="0" indent="0">
+              <a:buNone/>
+            </a:pPr>
+            <a:r>
+              <a:rPr lang="en-US" sz="1150" dirty="0" err="1">
+                <a:solidFill>
+                  <a:srgbClr val="374151"/>
+                </a:solidFill>
+                <a:latin typeface="Calibri" pitchFamily="34" charset="0"/>
+                <a:ea typeface="Calibri" pitchFamily="34" charset="-122"/>
+                <a:cs typeface="Calibri" pitchFamily="34" charset="-120"/>
+              </a:rPr>
+              <a:t>Pagina</a:t>
+            </a:r>
+            <a:r>
+              <a:rPr lang="en-US" sz="1150" dirty="0">
+                <a:solidFill>
+                  <a:srgbClr val="374151"/>
+                </a:solidFill>
+                <a:latin typeface="Calibri" pitchFamily="34" charset="0"/>
+                <a:ea typeface="Calibri" pitchFamily="34" charset="-122"/>
+                <a:cs typeface="Calibri" pitchFamily="34" charset="-120"/>
+              </a:rPr>
+              <a:t> </a:t>
+            </a:r>
+            <a:r>
+              <a:rPr lang="en-US" sz="1150" dirty="0" err="1">
+                <a:solidFill>
+                  <a:srgbClr val="374151"/>
+                </a:solidFill>
+                <a:latin typeface="Calibri" pitchFamily="34" charset="0"/>
+                <a:ea typeface="Calibri" pitchFamily="34" charset="-122"/>
+                <a:cs typeface="Calibri" pitchFamily="34" charset="-120"/>
+              </a:rPr>
+              <a:t>Profilo</a:t>
+            </a:r>
+            <a:endParaRPr lang="en-US" sz="1150" dirty="0"/>
+          </a:p>
+        </p:txBody>
+      </p:sp>
+      <p:sp>
+        <p:nvSpPr>
+          <p:cNvPr id="52" name="Shape 50"/>
+          <p:cNvSpPr/>
+          <p:nvPr/>
+        </p:nvSpPr>
+        <p:spPr>
+          <a:xfrm>
+            <a:off x="6190488" y="2423160"/>
+            <a:ext cx="2468880" cy="9144"/>
+          </a:xfrm>
+          <a:prstGeom prst="rect">
+            <a:avLst/>
+          </a:prstGeom>
+          <a:solidFill>
+            <a:srgbClr val="E5E7EB"/>
+          </a:solidFill>
+          <a:ln w="12700">
+            <a:solidFill>
+              <a:srgbClr val="E5E7EB"/>
+            </a:solidFill>
+            <a:prstDash val="solid"/>
+          </a:ln>
+        </p:spPr>
+      </p:sp>
+      <p:sp>
+        <p:nvSpPr>
+          <p:cNvPr id="53" name="Shape 51"/>
+          <p:cNvSpPr/>
+          <p:nvPr/>
+        </p:nvSpPr>
+        <p:spPr>
+          <a:xfrm>
+            <a:off x="6190488" y="2523744"/>
+            <a:ext cx="164592" cy="164592"/>
+          </a:xfrm>
+          <a:prstGeom prst="ellipse">
+            <a:avLst/>
+          </a:prstGeom>
+          <a:solidFill>
+            <a:srgbClr val="7C3AED"/>
+          </a:solidFill>
+          <a:ln w="12700">
+            <a:solidFill>
+              <a:srgbClr val="7C3AED"/>
+            </a:solidFill>
+            <a:prstDash val="solid"/>
+          </a:ln>
+        </p:spPr>
+      </p:sp>
+      <p:sp>
+        <p:nvSpPr>
+          <p:cNvPr id="54" name="Text 52"/>
+          <p:cNvSpPr/>
+          <p:nvPr/>
+        </p:nvSpPr>
+        <p:spPr>
+          <a:xfrm>
+            <a:off x="6419088" y="2441448"/>
+            <a:ext cx="2240280" cy="420624"/>
+          </a:xfrm>
+          <a:prstGeom prst="rect">
+            <a:avLst/>
+          </a:prstGeom>
+          <a:noFill/>
+          <a:ln/>
+        </p:spPr>
+        <p:txBody>
+          <a:bodyPr wrap="square" lIns="0" tIns="0" rIns="0" bIns="0" rtlCol="0" anchor="ctr"/>
+          <a:lstStyle/>
+          <a:p>
+            <a:pPr marL="0" indent="0">
+              <a:buNone/>
+            </a:pPr>
+            <a:endParaRPr lang="en-US" sz="1150" dirty="0"/>
+          </a:p>
+        </p:txBody>
+      </p:sp>
+      <p:sp>
+        <p:nvSpPr>
+          <p:cNvPr id="55" name="Shape 53"/>
+          <p:cNvSpPr/>
+          <p:nvPr/>
+        </p:nvSpPr>
+        <p:spPr>
+          <a:xfrm>
+            <a:off x="6190488" y="2880360"/>
+            <a:ext cx="2468880" cy="9144"/>
+          </a:xfrm>
+          <a:prstGeom prst="rect">
+            <a:avLst/>
+          </a:prstGeom>
+          <a:solidFill>
+            <a:srgbClr val="E5E7EB"/>
+          </a:solidFill>
+          <a:ln w="12700">
+            <a:solidFill>
+              <a:srgbClr val="E5E7EB"/>
+            </a:solidFill>
+            <a:prstDash val="solid"/>
+          </a:ln>
+        </p:spPr>
+      </p:sp>
+      <p:sp>
+        <p:nvSpPr>
+          <p:cNvPr id="58" name="Shape 56"/>
+          <p:cNvSpPr/>
+          <p:nvPr/>
+        </p:nvSpPr>
+        <p:spPr>
+          <a:xfrm>
+            <a:off x="6190488" y="3337560"/>
+            <a:ext cx="2468880" cy="9144"/>
+          </a:xfrm>
+          <a:prstGeom prst="rect">
+            <a:avLst/>
+          </a:prstGeom>
+          <a:solidFill>
+            <a:srgbClr val="E5E7EB"/>
+          </a:solidFill>
+          <a:ln w="12700">
+            <a:solidFill>
+              <a:srgbClr val="E5E7EB"/>
+            </a:solidFill>
+            <a:prstDash val="solid"/>
+          </a:ln>
+        </p:spPr>
+      </p:sp>
+      <p:sp>
+        <p:nvSpPr>
+          <p:cNvPr id="60" name="Text 58"/>
+          <p:cNvSpPr/>
+          <p:nvPr/>
+        </p:nvSpPr>
+        <p:spPr>
+          <a:xfrm>
+            <a:off x="6419088" y="3355848"/>
+            <a:ext cx="2240280" cy="420624"/>
+          </a:xfrm>
+          <a:prstGeom prst="rect">
+            <a:avLst/>
+          </a:prstGeom>
+          <a:noFill/>
+          <a:ln/>
+        </p:spPr>
+        <p:txBody>
+          <a:bodyPr wrap="square" lIns="0" tIns="0" rIns="0" bIns="0" rtlCol="0" anchor="ctr"/>
+          <a:lstStyle/>
+          <a:p>
+            <a:pPr marL="0" indent="0">
+              <a:buNone/>
+            </a:pPr>
+            <a:endParaRPr lang="en-US" sz="1150" dirty="0"/>
+          </a:p>
+        </p:txBody>
+      </p:sp>
+      <p:sp>
+        <p:nvSpPr>
+          <p:cNvPr id="61" name="Shape 59"/>
+          <p:cNvSpPr/>
+          <p:nvPr/>
+        </p:nvSpPr>
+        <p:spPr>
+          <a:xfrm>
+            <a:off x="6190488" y="3794760"/>
+            <a:ext cx="2468880" cy="9144"/>
+          </a:xfrm>
+          <a:prstGeom prst="rect">
+            <a:avLst/>
+          </a:prstGeom>
+          <a:solidFill>
+            <a:srgbClr val="E5E7EB"/>
+          </a:solidFill>
+          <a:ln w="12700">
+            <a:solidFill>
+              <a:srgbClr val="E5E7EB"/>
+            </a:solidFill>
+            <a:prstDash val="solid"/>
+          </a:ln>
+        </p:spPr>
+      </p:sp>
+      <p:sp>
+        <p:nvSpPr>
+          <p:cNvPr id="63" name="Text 61"/>
+          <p:cNvSpPr/>
+          <p:nvPr/>
+        </p:nvSpPr>
+        <p:spPr>
+          <a:xfrm>
+            <a:off x="6419088" y="3813048"/>
+            <a:ext cx="2240280" cy="420624"/>
+          </a:xfrm>
+          <a:prstGeom prst="rect">
+            <a:avLst/>
+          </a:prstGeom>
+          <a:noFill/>
+          <a:ln/>
+        </p:spPr>
+        <p:txBody>
+          <a:bodyPr wrap="square" lIns="0" tIns="0" rIns="0" bIns="0" rtlCol="0" anchor="ctr"/>
+          <a:lstStyle/>
+          <a:p>
+            <a:pPr marL="0" indent="0">
+              <a:buNone/>
+            </a:pPr>
+            <a:endParaRPr lang="en-US" sz="1150" dirty="0"/>
+          </a:p>
+        </p:txBody>
+      </p:sp>
+      <p:sp>
+        <p:nvSpPr>
+          <p:cNvPr id="64" name="Shape 62"/>
+          <p:cNvSpPr/>
+          <p:nvPr/>
+        </p:nvSpPr>
+        <p:spPr>
+          <a:xfrm>
+            <a:off x="6190488" y="4251960"/>
+            <a:ext cx="2468880" cy="9144"/>
+          </a:xfrm>
+          <a:prstGeom prst="rect">
+            <a:avLst/>
+          </a:prstGeom>
+          <a:solidFill>
+            <a:srgbClr val="E5E7EB"/>
+          </a:solidFill>
+          <a:ln w="12700">
+            <a:solidFill>
+              <a:srgbClr val="E5E7EB"/>
+            </a:solidFill>
+            <a:prstDash val="solid"/>
+          </a:ln>
+        </p:spPr>
+      </p:sp>
+      <p:sp>
+        <p:nvSpPr>
+          <p:cNvPr id="66" name="Text 64"/>
+          <p:cNvSpPr/>
+          <p:nvPr/>
+        </p:nvSpPr>
+        <p:spPr>
+          <a:xfrm>
+            <a:off x="6419088" y="4270248"/>
+            <a:ext cx="2240280" cy="420624"/>
+          </a:xfrm>
+          <a:prstGeom prst="rect">
+            <a:avLst/>
+          </a:prstGeom>
+          <a:noFill/>
+          <a:ln/>
+        </p:spPr>
+        <p:txBody>
+          <a:bodyPr wrap="square" lIns="0" tIns="0" rIns="0" bIns="0" rtlCol="0" anchor="ctr"/>
+          <a:lstStyle/>
+          <a:p>
+            <a:pPr marL="0" indent="0">
+              <a:buNone/>
+            </a:pPr>
+            <a:endParaRPr lang="en-US" sz="1150" dirty="0"/>
+          </a:p>
+        </p:txBody>
+      </p:sp>
+      <p:sp>
+        <p:nvSpPr>
+          <p:cNvPr id="69" name="Text 34">
+            <a:extLst>
+              <a:ext uri="{FF2B5EF4-FFF2-40B4-BE49-F238E27FC236}">
+                <a16:creationId xmlns:a16="http://schemas.microsoft.com/office/drawing/2014/main" id="{069F5899-5183-939D-2E1C-1C9FF9FE101A}"/>
+              </a:ext>
+            </a:extLst>
+          </p:cNvPr>
+          <p:cNvSpPr/>
+          <p:nvPr/>
+        </p:nvSpPr>
+        <p:spPr>
+          <a:xfrm>
+            <a:off x="3598164" y="3803904"/>
+            <a:ext cx="2240280" cy="420624"/>
+          </a:xfrm>
+          <a:prstGeom prst="rect">
+            <a:avLst/>
+          </a:prstGeom>
+          <a:noFill/>
+          <a:ln/>
+        </p:spPr>
+        <p:txBody>
+          <a:bodyPr wrap="square" lIns="0" tIns="0" rIns="0" bIns="0" rtlCol="0" anchor="ctr"/>
+          <a:lstStyle/>
+          <a:p>
+            <a:pPr marL="0" indent="0">
+              <a:buNone/>
+            </a:pPr>
+            <a:r>
+              <a:rPr lang="en-US" sz="1150" dirty="0" err="1">
+                <a:solidFill>
+                  <a:srgbClr val="374151"/>
+                </a:solidFill>
+                <a:latin typeface="Calibri" pitchFamily="34" charset="0"/>
+                <a:ea typeface="Calibri" pitchFamily="34" charset="-122"/>
+                <a:cs typeface="Calibri" pitchFamily="34" charset="-120"/>
+              </a:rPr>
+              <a:t>Navigazione</a:t>
+            </a:r>
+            <a:r>
+              <a:rPr lang="en-US" sz="1150" dirty="0">
+                <a:solidFill>
+                  <a:srgbClr val="374151"/>
+                </a:solidFill>
+                <a:latin typeface="Calibri" pitchFamily="34" charset="0"/>
+                <a:ea typeface="Calibri" pitchFamily="34" charset="-122"/>
+                <a:cs typeface="Calibri" pitchFamily="34" charset="-120"/>
+              </a:rPr>
+              <a:t> </a:t>
+            </a:r>
+            <a:r>
+              <a:rPr lang="en-US" sz="1150" dirty="0" err="1">
+                <a:solidFill>
+                  <a:srgbClr val="374151"/>
+                </a:solidFill>
+                <a:latin typeface="Calibri" pitchFamily="34" charset="0"/>
+                <a:ea typeface="Calibri" pitchFamily="34" charset="-122"/>
+                <a:cs typeface="Calibri" pitchFamily="34" charset="-120"/>
+              </a:rPr>
+              <a:t>pagine</a:t>
+            </a:r>
+            <a:endParaRPr lang="en-US" sz="1150" dirty="0"/>
+          </a:p>
+        </p:txBody>
+      </p:sp>
+      <p:sp>
+        <p:nvSpPr>
+          <p:cNvPr id="70" name="Text 28">
+            <a:extLst>
+              <a:ext uri="{FF2B5EF4-FFF2-40B4-BE49-F238E27FC236}">
+                <a16:creationId xmlns:a16="http://schemas.microsoft.com/office/drawing/2014/main" id="{2874C55E-130E-9198-2AF5-0B62AFB1198F}"/>
+              </a:ext>
+            </a:extLst>
+          </p:cNvPr>
+          <p:cNvSpPr/>
+          <p:nvPr/>
+        </p:nvSpPr>
+        <p:spPr>
+          <a:xfrm>
+            <a:off x="3611880" y="1956816"/>
+            <a:ext cx="2240280" cy="420624"/>
+          </a:xfrm>
+          <a:prstGeom prst="rect">
+            <a:avLst/>
+          </a:prstGeom>
+          <a:noFill/>
+          <a:ln/>
+        </p:spPr>
+        <p:txBody>
+          <a:bodyPr wrap="square" lIns="0" tIns="0" rIns="0" bIns="0" rtlCol="0" anchor="ctr"/>
+          <a:lstStyle/>
+          <a:p>
+            <a:pPr marL="0" indent="0">
+              <a:buNone/>
+            </a:pPr>
+            <a:r>
+              <a:rPr lang="en-US" sz="1150" dirty="0" err="1">
+                <a:solidFill>
+                  <a:srgbClr val="374151"/>
+                </a:solidFill>
+                <a:latin typeface="Calibri" pitchFamily="34" charset="0"/>
+                <a:ea typeface="Calibri" pitchFamily="34" charset="-122"/>
+                <a:cs typeface="Calibri" pitchFamily="34" charset="-120"/>
+              </a:rPr>
+              <a:t>Architettura</a:t>
+            </a:r>
+            <a:r>
+              <a:rPr lang="en-US" sz="1150" dirty="0">
+                <a:solidFill>
+                  <a:srgbClr val="374151"/>
+                </a:solidFill>
+                <a:latin typeface="Calibri" pitchFamily="34" charset="0"/>
+                <a:ea typeface="Calibri" pitchFamily="34" charset="-122"/>
+                <a:cs typeface="Calibri" pitchFamily="34" charset="-120"/>
+              </a:rPr>
+              <a:t> del </a:t>
+            </a:r>
+            <a:r>
+              <a:rPr lang="en-US" sz="1150" dirty="0" err="1">
+                <a:solidFill>
+                  <a:srgbClr val="374151"/>
+                </a:solidFill>
+                <a:latin typeface="Calibri" pitchFamily="34" charset="0"/>
+                <a:ea typeface="Calibri" pitchFamily="34" charset="-122"/>
+                <a:cs typeface="Calibri" pitchFamily="34" charset="-120"/>
+              </a:rPr>
+              <a:t>progetto</a:t>
+            </a:r>
+            <a:endParaRPr lang="en-US" sz="1150" dirty="0"/>
+          </a:p>
+        </p:txBody>
+      </p:sp>
+      <p:sp>
+        <p:nvSpPr>
+          <p:cNvPr id="72" name="Text 7">
+            <a:extLst>
+              <a:ext uri="{FF2B5EF4-FFF2-40B4-BE49-F238E27FC236}">
+                <a16:creationId xmlns:a16="http://schemas.microsoft.com/office/drawing/2014/main" id="{D8A3E499-5B7F-96FB-0C1C-1BFFEAB8278E}"/>
+              </a:ext>
+            </a:extLst>
+          </p:cNvPr>
+          <p:cNvSpPr/>
+          <p:nvPr/>
+        </p:nvSpPr>
+        <p:spPr>
+          <a:xfrm>
+            <a:off x="6464808" y="1947672"/>
+            <a:ext cx="2240280" cy="420624"/>
+          </a:xfrm>
+          <a:prstGeom prst="rect">
+            <a:avLst/>
+          </a:prstGeom>
+          <a:noFill/>
+          <a:ln/>
+        </p:spPr>
+        <p:txBody>
+          <a:bodyPr wrap="square" lIns="0" tIns="0" rIns="0" bIns="0" rtlCol="0" anchor="ctr"/>
+          <a:lstStyle/>
+          <a:p>
+            <a:pPr marL="0" indent="0">
+              <a:buNone/>
+            </a:pPr>
+            <a:r>
+              <a:rPr lang="en-US" sz="1150" dirty="0" err="1">
+                <a:solidFill>
+                  <a:srgbClr val="374151"/>
+                </a:solidFill>
+                <a:latin typeface="Calibri" pitchFamily="34" charset="0"/>
+                <a:ea typeface="Calibri" pitchFamily="34" charset="-122"/>
+                <a:cs typeface="Calibri" pitchFamily="34" charset="-120"/>
+              </a:rPr>
+              <a:t>Architettura</a:t>
+            </a:r>
+            <a:r>
+              <a:rPr lang="en-US" sz="1150" dirty="0">
+                <a:solidFill>
+                  <a:srgbClr val="374151"/>
+                </a:solidFill>
+                <a:latin typeface="Calibri" pitchFamily="34" charset="0"/>
+                <a:ea typeface="Calibri" pitchFamily="34" charset="-122"/>
+                <a:cs typeface="Calibri" pitchFamily="34" charset="-120"/>
+              </a:rPr>
+              <a:t> del progetto</a:t>
+            </a:r>
+            <a:endParaRPr lang="en-US" sz="1150" dirty="0"/>
+          </a:p>
+        </p:txBody>
+      </p:sp>
+    </p:spTree>
+  </p:cSld>
+  <p:clrMapOvr>
+    <a:masterClrMapping/>
+  </p:clrMapOvr>
+</p:sld>
+</file>
+
+<file path=ppt/slides/slide11.xml><?xml version="1.0" encoding="utf-8"?>
 <p:sld xmlns:a="http://schemas.openxmlformats.org/drawingml/2006/main" xmlns:r="http://schemas.openxmlformats.org/officeDocument/2006/relationships" xmlns:p="http://schemas.openxmlformats.org/presentationml/2006/main">
   <p:cSld name="Slide 10">
     <p:bg>
